--- a/CalendarioAgo26/presentaciones/2_Jerarquia.pptx
+++ b/CalendarioAgo26/presentaciones/2_Jerarquia.pptx
@@ -143,6 +143,35 @@
 </p:presentation>
 </file>
 
+<file path=ppt/changesInfos/changesInfo1.xml><?xml version="1.0" encoding="utf-8"?>
+<pc:chgInfo xmlns:a="http://schemas.openxmlformats.org/drawingml/2006/main" xmlns:r="http://schemas.openxmlformats.org/officeDocument/2006/relationships" xmlns:ac="http://schemas.microsoft.com/office/drawing/2013/main/command" xmlns:pc="http://schemas.microsoft.com/office/powerpoint/2013/main/command">
+  <pc:docChgLst>
+    <pc:chgData name="Lizethe Pérez Fuertes" userId="4ae9ef87-2a7d-42f8-8dfa-0a501a9e2ff4" providerId="ADAL" clId="{FDDD45CB-1330-4033-A842-3D2746AFF7C7}"/>
+    <pc:docChg chg="modSld">
+      <pc:chgData name="Lizethe Pérez Fuertes" userId="4ae9ef87-2a7d-42f8-8dfa-0a501a9e2ff4" providerId="ADAL" clId="{FDDD45CB-1330-4033-A842-3D2746AFF7C7}" dt="2026-08-10T23:16:39.286" v="3" actId="20577"/>
+      <pc:docMkLst>
+        <pc:docMk/>
+      </pc:docMkLst>
+      <pc:sldChg chg="modSp mod">
+        <pc:chgData name="Lizethe Pérez Fuertes" userId="4ae9ef87-2a7d-42f8-8dfa-0a501a9e2ff4" providerId="ADAL" clId="{FDDD45CB-1330-4033-A842-3D2746AFF7C7}" dt="2026-08-10T23:16:39.286" v="3" actId="20577"/>
+        <pc:sldMkLst>
+          <pc:docMk/>
+          <pc:sldMk cId="2553855534" sldId="257"/>
+        </pc:sldMkLst>
+        <pc:spChg chg="mod">
+          <ac:chgData name="Lizethe Pérez Fuertes" userId="4ae9ef87-2a7d-42f8-8dfa-0a501a9e2ff4" providerId="ADAL" clId="{FDDD45CB-1330-4033-A842-3D2746AFF7C7}" dt="2026-08-10T23:16:39.286" v="3" actId="20577"/>
+          <ac:spMkLst>
+            <pc:docMk/>
+            <pc:sldMk cId="2553855534" sldId="257"/>
+            <ac:spMk id="2" creationId="{00000000-0000-0000-0000-000000000000}"/>
+          </ac:spMkLst>
+        </pc:spChg>
+      </pc:sldChg>
+    </pc:docChg>
+  </pc:docChgLst>
+</pc:chgInfo>
+</file>
+
 <file path=ppt/notesMasters/notesMaster1.xml><?xml version="1.0" encoding="utf-8"?>
 <p:notesMaster xmlns:a="http://schemas.openxmlformats.org/drawingml/2006/main" xmlns:r="http://schemas.openxmlformats.org/officeDocument/2006/relationships" xmlns:p="http://schemas.openxmlformats.org/presentationml/2006/main">
   <p:cSld>
@@ -225,7 +254,7 @@
           <a:p>
             <a:fld id="{2D445F07-8756-451B-A938-0248325FC7BB}" type="datetimeFigureOut">
               <a:rPr lang="es-MX" smtClean="0"/>
-              <a:t>08/08/2022</a:t>
+              <a:t>10/08/2026</a:t>
             </a:fld>
             <a:endParaRPr lang="es-MX" dirty="0"/>
           </a:p>
@@ -1430,7 +1459,7 @@
           <a:p>
             <a:fld id="{5E75A0DC-66C6-4CEC-A5EB-F8C97CEC3796}" type="datetimeFigureOut">
               <a:rPr lang="es-MX" smtClean="0"/>
-              <a:t>08/08/2022</a:t>
+              <a:t>10/08/2026</a:t>
             </a:fld>
             <a:endParaRPr lang="es-MX" dirty="0"/>
           </a:p>
@@ -1600,7 +1629,7 @@
           <a:p>
             <a:fld id="{5E75A0DC-66C6-4CEC-A5EB-F8C97CEC3796}" type="datetimeFigureOut">
               <a:rPr lang="es-MX" smtClean="0"/>
-              <a:t>08/08/2022</a:t>
+              <a:t>10/08/2026</a:t>
             </a:fld>
             <a:endParaRPr lang="es-MX" dirty="0"/>
           </a:p>
@@ -1780,7 +1809,7 @@
           <a:p>
             <a:fld id="{5E75A0DC-66C6-4CEC-A5EB-F8C97CEC3796}" type="datetimeFigureOut">
               <a:rPr lang="es-MX" smtClean="0"/>
-              <a:t>08/08/2022</a:t>
+              <a:t>10/08/2026</a:t>
             </a:fld>
             <a:endParaRPr lang="es-MX" dirty="0"/>
           </a:p>
@@ -1933,7 +1962,7 @@
           <a:p>
             <a:fld id="{1D8BD707-D9CF-40AE-B4C6-C98DA3205C09}" type="datetimeFigureOut">
               <a:rPr lang="en-US" smtClean="0"/>
-              <a:t>8/8/2022</a:t>
+              <a:t>8/10/2026</a:t>
             </a:fld>
             <a:endParaRPr lang="en-US"/>
           </a:p>
@@ -2057,7 +2086,7 @@
           <a:p>
             <a:fld id="{1D8BD707-D9CF-40AE-B4C6-C98DA3205C09}" type="datetimeFigureOut">
               <a:rPr lang="en-US" smtClean="0"/>
-              <a:t>8/8/2022</a:t>
+              <a:t>8/10/2026</a:t>
             </a:fld>
             <a:endParaRPr lang="en-US" dirty="0"/>
           </a:p>
@@ -2217,7 +2246,7 @@
           <a:p>
             <a:fld id="{5E75A0DC-66C6-4CEC-A5EB-F8C97CEC3796}" type="datetimeFigureOut">
               <a:rPr lang="es-MX" smtClean="0"/>
-              <a:t>08/08/2022</a:t>
+              <a:t>10/08/2026</a:t>
             </a:fld>
             <a:endParaRPr lang="es-MX" dirty="0"/>
           </a:p>
@@ -2463,7 +2492,7 @@
           <a:p>
             <a:fld id="{5E75A0DC-66C6-4CEC-A5EB-F8C97CEC3796}" type="datetimeFigureOut">
               <a:rPr lang="es-MX" smtClean="0"/>
-              <a:t>08/08/2022</a:t>
+              <a:t>10/08/2026</a:t>
             </a:fld>
             <a:endParaRPr lang="es-MX" dirty="0"/>
           </a:p>
@@ -2751,7 +2780,7 @@
           <a:p>
             <a:fld id="{5E75A0DC-66C6-4CEC-A5EB-F8C97CEC3796}" type="datetimeFigureOut">
               <a:rPr lang="es-MX" smtClean="0"/>
-              <a:t>08/08/2022</a:t>
+              <a:t>10/08/2026</a:t>
             </a:fld>
             <a:endParaRPr lang="es-MX" dirty="0"/>
           </a:p>
@@ -3173,7 +3202,7 @@
           <a:p>
             <a:fld id="{5E75A0DC-66C6-4CEC-A5EB-F8C97CEC3796}" type="datetimeFigureOut">
               <a:rPr lang="es-MX" smtClean="0"/>
-              <a:t>08/08/2022</a:t>
+              <a:t>10/08/2026</a:t>
             </a:fld>
             <a:endParaRPr lang="es-MX" dirty="0"/>
           </a:p>
@@ -3291,7 +3320,7 @@
           <a:p>
             <a:fld id="{5E75A0DC-66C6-4CEC-A5EB-F8C97CEC3796}" type="datetimeFigureOut">
               <a:rPr lang="es-MX" smtClean="0"/>
-              <a:t>08/08/2022</a:t>
+              <a:t>10/08/2026</a:t>
             </a:fld>
             <a:endParaRPr lang="es-MX" dirty="0"/>
           </a:p>
@@ -3386,7 +3415,7 @@
           <a:p>
             <a:fld id="{5E75A0DC-66C6-4CEC-A5EB-F8C97CEC3796}" type="datetimeFigureOut">
               <a:rPr lang="es-MX" smtClean="0"/>
-              <a:t>08/08/2022</a:t>
+              <a:t>10/08/2026</a:t>
             </a:fld>
             <a:endParaRPr lang="es-MX" dirty="0"/>
           </a:p>
@@ -3663,7 +3692,7 @@
           <a:p>
             <a:fld id="{5E75A0DC-66C6-4CEC-A5EB-F8C97CEC3796}" type="datetimeFigureOut">
               <a:rPr lang="es-MX" smtClean="0"/>
-              <a:t>08/08/2022</a:t>
+              <a:t>10/08/2026</a:t>
             </a:fld>
             <a:endParaRPr lang="es-MX" dirty="0"/>
           </a:p>
@@ -3916,7 +3945,7 @@
           <a:p>
             <a:fld id="{5E75A0DC-66C6-4CEC-A5EB-F8C97CEC3796}" type="datetimeFigureOut">
               <a:rPr lang="es-MX" smtClean="0"/>
-              <a:t>08/08/2022</a:t>
+              <a:t>10/08/2026</a:t>
             </a:fld>
             <a:endParaRPr lang="es-MX" dirty="0"/>
           </a:p>
@@ -4129,7 +4158,7 @@
           <a:p>
             <a:fld id="{5E75A0DC-66C6-4CEC-A5EB-F8C97CEC3796}" type="datetimeFigureOut">
               <a:rPr lang="es-MX" smtClean="0"/>
-              <a:t>08/08/2022</a:t>
+              <a:t>10/08/2026</a:t>
             </a:fld>
             <a:endParaRPr lang="es-MX" dirty="0"/>
           </a:p>
@@ -4535,14 +4564,24 @@
               <a:defRPr/>
             </a:pPr>
             <a:r>
-              <a:rPr lang="es-MX" sz="3200" dirty="0">
+              <a:rPr lang="es-MX" sz="3200">
                 <a:solidFill>
                   <a:schemeClr val="bg2">
                     <a:lumMod val="50000"/>
                   </a:schemeClr>
                 </a:solidFill>
               </a:rPr>
-              <a:t>TC 3001 C </a:t>
+              <a:t>TI 3008 </a:t>
+            </a:r>
+            <a:r>
+              <a:rPr lang="es-MX" sz="3200" dirty="0">
+                <a:solidFill>
+                  <a:schemeClr val="bg2">
+                    <a:lumMod val="50000"/>
+                  </a:schemeClr>
+                </a:solidFill>
+              </a:rPr>
+              <a:t>C </a:t>
             </a:r>
             <a:br>
               <a:rPr lang="es-MX" sz="3200" dirty="0">
